--- a/残留分析.pptx
+++ b/残留分析.pptx
@@ -422,27 +422,7 @@
         <p:txBody>
           <a:bodyPr/>
           <a:lstStyle/>
-          <a:p>
-            <a:r>
-              <a:t>四个原则分别回应前一页的断层：路径、身份、分区、证据。后续模块都是这些原则的工程实现。</a:t>
-            </a:r>
-          </a:p>
           <a:p/>
-          <a:p>
-            <a:r>
-              <a:t>[Sources]</a:t>
-            </a:r>
-          </a:p>
-          <a:p>
-            <a:r>
-              <a:t>- E:/yanjiusheng/阅读论文/file_system/SE_EOD/docs/METADATA_RESIDUAL_ARCHITECTURE.md</a:t>
-            </a:r>
-          </a:p>
-          <a:p>
-            <a:r>
-              <a:t>- E:/yanjiusheng/阅读论文/file_system/SE_EOD/docs/PROJECT_ARCHITECTURE.md</a:t>
-            </a:r>
-          </a:p>
         </p:txBody>
       </p:sp>
       <p:sp>
@@ -506,47 +486,7 @@
         <p:txBody>
           <a:bodyPr/>
           <a:lstStyle/>
-          <a:p>
-            <a:r>
-              <a:t>按三层讲模块，而不是逐个文件报菜名：程序理解、残差计算、证据治理。</a:t>
-            </a:r>
-          </a:p>
           <a:p/>
-          <a:p>
-            <a:r>
-              <a:t>[Sources]</a:t>
-            </a:r>
-          </a:p>
-          <a:p>
-            <a:r>
-              <a:t>- E:/yanjiusheng/阅读论文/file_system/SE_EOD/docs/PROJECT_ARCHITECTURE.md</a:t>
-            </a:r>
-          </a:p>
-          <a:p>
-            <a:r>
-              <a:t>- E:/yanjiusheng/阅读论文/file_system/SE_EOD/src/frontend/model.py</a:t>
-            </a:r>
-          </a:p>
-          <a:p>
-            <a:r>
-              <a:t>- E:/yanjiusheng/阅读论文/file_system/SE_EOD/src/cfg.py</a:t>
-            </a:r>
-          </a:p>
-          <a:p>
-            <a:r>
-              <a:t>- E:/yanjiusheng/阅读论文/file_system/SE_EOD/src/effect_extractor.py</a:t>
-            </a:r>
-          </a:p>
-          <a:p>
-            <a:r>
-              <a:t>- E:/yanjiusheng/阅读论文/file_system/SE_EOD/src/residual_slicer.py</a:t>
-            </a:r>
-          </a:p>
-          <a:p>
-            <a:r>
-              <a:t>- E:/yanjiusheng/阅读论文/file_system/SE_EOD/src/function_summary.py</a:t>
-            </a:r>
-          </a:p>
         </p:txBody>
       </p:sp>
       <p:sp>
@@ -610,27 +550,7 @@
         <p:txBody>
           <a:bodyPr/>
           <a:lstStyle/>
-          <a:p>
-            <a:r>
-              <a:t>Effect schema 使结构、计数、恢复三类元数据共享统一表示；取消必须在身份和数值上兼容。</a:t>
-            </a:r>
-          </a:p>
           <a:p/>
-          <a:p>
-            <a:r>
-              <a:t>[Sources]</a:t>
-            </a:r>
-          </a:p>
-          <a:p>
-            <a:r>
-              <a:t>- E:/yanjiusheng/阅读论文/file_system/SE_EOD/src/metadata_residual.py</a:t>
-            </a:r>
-          </a:p>
-          <a:p>
-            <a:r>
-              <a:t>- E:/yanjiusheng/阅读论文/file_system/SE_EOD/docs/METADATA_RESIDUAL_ARCHITECTURE.md</a:t>
-            </a:r>
-          </a:p>
         </p:txBody>
       </p:sp>
       <p:sp>
@@ -694,32 +614,7 @@
         <p:txBody>
           <a:bodyPr/>
           <a:lstStyle/>
-          <a:p>
-            <a:r>
-              <a:t>一页讲完确认案例：4213 发布引用，4217 提交失败，out_unset 未对同一 owner 字段执行 DROP。动态注入进一步确认引用残留。</a:t>
-            </a:r>
-          </a:p>
           <a:p/>
-          <a:p>
-            <a:r>
-              <a:t>[Sources]</a:t>
-            </a:r>
-          </a:p>
-          <a:p>
-            <a:r>
-              <a:t>- E:/yanjiusheng/阅读论文/file_system/SE_EOD/linux-sources/linux-v6.14-fs/fs/btrfs/relocation.c</a:t>
-            </a:r>
-          </a:p>
-          <a:p>
-            <a:r>
-              <a:t>- E:/yanjiusheng/阅读论文/file_system/SE_EOD/outputs/confirmed_bugs.md</a:t>
-            </a:r>
-          </a:p>
-          <a:p>
-            <a:r>
-              <a:t>- E:/yanjiusheng/阅读论文/file_system/SE_EOD/outputs/linux-v6.8/btrfs/recover_relocation_qemu_report.md</a:t>
-            </a:r>
-          </a:p>
         </p:txBody>
       </p:sp>
       <p:sp>
@@ -783,27 +678,7 @@
         <p:txBody>
           <a:bodyPr/>
           <a:lstStyle/>
-          <a:p>
-            <a:r>
-              <a:t>P1 是最贴近核心方法的候选：SET bit 到达验证失败，错误出口没有 CLEAR，且 owner 是长生命周期 fs_info。</a:t>
-            </a:r>
-          </a:p>
           <a:p/>
-          <a:p>
-            <a:r>
-              <a:t>[Sources]</a:t>
-            </a:r>
-          </a:p>
-          <a:p>
-            <a:r>
-              <a:t>- E:/yanjiusheng/阅读论文/file_system/SE_EOD/outputs/btrfs_tool_findings_pending_review_2026-07-23.md</a:t>
-            </a:r>
-          </a:p>
-          <a:p>
-            <a:r>
-              <a:t>- E:/yanjiusheng/阅读论文/file_system/SE_EOD/linux-sources/linux-v6.14-fs/fs/btrfs/super.c</a:t>
-            </a:r>
-          </a:p>
         </p:txBody>
       </p:sp>
       <p:sp>
@@ -2577,7 +2452,7 @@
                 <a:ea typeface="微软雅黑" panose="020B0503020204020204" charset="-122"/>
                 <a:cs typeface="微软雅黑" panose="020B0503020204020204" charset="-122"/>
               </a:rPr>
-              <a:t>效果和取消必须匹配 Root、Key、Plane、Value，避免名称相似造成误抵消。</a:t>
+              <a:t>效果和取消必须匹配。</a:t>
             </a:r>
             <a:endParaRPr sz="1600" b="0">
               <a:solidFill>
